--- a/HW1/1-Введение в Web-технологии. Структура HTML.pptx
+++ b/HW1/1-Введение в Web-технологии. Структура HTML.pptx
@@ -18671,7 +18671,7 @@
       </p:grpSpPr>
       <p:pic>
         <p:nvPicPr>
-          <p:cNvPr id="4" name="Рисунок 3" descr="логотип STEP ACADEMY (белый).png"/>
+          <p:cNvPr id="4" name="Рисунок 3" descr=""/>
           <p:cNvPicPr>
             <a:picLocks noChangeAspect="1"/>
           </p:cNvPicPr>
@@ -20994,7 +20994,7 @@
       </p:grpSpPr>
       <p:pic>
         <p:nvPicPr>
-          <p:cNvPr id="2050" name="Picture 2" descr="https://cdn-images-1.medium.com/max/1200/1*jCn7s1U8Kui514py5E4ydw.jpeg"/>
+          <p:cNvPr id="2050" name="Picture 2" descr=""/>
           <p:cNvPicPr>
             <a:picLocks noChangeAspect="1" noChangeArrowheads="1"/>
           </p:cNvPicPr>
@@ -35459,7 +35459,7 @@
       </p:grpSpPr>
       <p:pic>
         <p:nvPicPr>
-          <p:cNvPr id="121858" name="Picture 2" descr="https://webeden.co.uk/blog/wp-content/uploads/2013/04/html_cloud.jpg"/>
+          <p:cNvPr id="121858" name="Picture 2" descr=""/>
           <p:cNvPicPr>
             <a:picLocks noChangeAspect="1" noChangeArrowheads="1"/>
           </p:cNvPicPr>

--- a/HW1/1-Введение в Web-технологии. Структура HTML.pptx
+++ b/HW1/1-Введение в Web-технологии. Структура HTML.pptx
@@ -18755,7 +18755,7 @@
                   </a:schemeClr>
                 </a:solidFill>
               </a:rPr>
-              <a:t>Зуев Александр</a:t>
+              <a:t/>
             </a:r>
             <a:endParaRPr lang="ru-RU" sz="3600" b="1" i="1" dirty="0">
               <a:ln w="50800"/>
